--- a/Docs autocad/YOUTUBE.pptx
+++ b/Docs autocad/YOUTUBE.pptx
@@ -6,6 +6,10 @@
   </p:sldMasterIdLst>
   <p:sldIdLst>
     <p:sldId id="256" r:id="rId2"/>
+    <p:sldId id="257" r:id="rId3"/>
+    <p:sldId id="258" r:id="rId4"/>
+    <p:sldId id="259" r:id="rId5"/>
+    <p:sldId id="260" r:id="rId6"/>
   </p:sldIdLst>
   <p:sldSz cx="12192000" cy="6858000"/>
   <p:notesSz cx="6858000" cy="9144000"/>
@@ -104,6 +108,11 @@
       </a:defRPr>
     </a:lvl9pPr>
   </p:defaultTextStyle>
+  <p:extLst>
+    <p:ext uri="{EFAFB233-063F-42B5-8137-9DF3F51BA10A}">
+      <p15:sldGuideLst xmlns:p15="http://schemas.microsoft.com/office/powerpoint/2012/main"/>
+    </p:ext>
+  </p:extLst>
 </p:presentation>
 </file>
 
@@ -256,7 +265,7 @@
           <a:p>
             <a:fld id="{FF6091C4-8205-4F01-9B67-60CD262772CA}" type="datetimeFigureOut">
               <a:rPr lang="es-GT" smtClean="0"/>
-              <a:t>19/02/2026</a:t>
+              <a:t>22/02/2026</a:t>
             </a:fld>
             <a:endParaRPr lang="es-GT"/>
           </a:p>
@@ -456,7 +465,7 @@
           <a:p>
             <a:fld id="{FF6091C4-8205-4F01-9B67-60CD262772CA}" type="datetimeFigureOut">
               <a:rPr lang="es-GT" smtClean="0"/>
-              <a:t>19/02/2026</a:t>
+              <a:t>22/02/2026</a:t>
             </a:fld>
             <a:endParaRPr lang="es-GT"/>
           </a:p>
@@ -666,7 +675,7 @@
           <a:p>
             <a:fld id="{FF6091C4-8205-4F01-9B67-60CD262772CA}" type="datetimeFigureOut">
               <a:rPr lang="es-GT" smtClean="0"/>
-              <a:t>19/02/2026</a:t>
+              <a:t>22/02/2026</a:t>
             </a:fld>
             <a:endParaRPr lang="es-GT"/>
           </a:p>
@@ -866,7 +875,7 @@
           <a:p>
             <a:fld id="{FF6091C4-8205-4F01-9B67-60CD262772CA}" type="datetimeFigureOut">
               <a:rPr lang="es-GT" smtClean="0"/>
-              <a:t>19/02/2026</a:t>
+              <a:t>22/02/2026</a:t>
             </a:fld>
             <a:endParaRPr lang="es-GT"/>
           </a:p>
@@ -1142,7 +1151,7 @@
           <a:p>
             <a:fld id="{FF6091C4-8205-4F01-9B67-60CD262772CA}" type="datetimeFigureOut">
               <a:rPr lang="es-GT" smtClean="0"/>
-              <a:t>19/02/2026</a:t>
+              <a:t>22/02/2026</a:t>
             </a:fld>
             <a:endParaRPr lang="es-GT"/>
           </a:p>
@@ -1410,7 +1419,7 @@
           <a:p>
             <a:fld id="{FF6091C4-8205-4F01-9B67-60CD262772CA}" type="datetimeFigureOut">
               <a:rPr lang="es-GT" smtClean="0"/>
-              <a:t>19/02/2026</a:t>
+              <a:t>22/02/2026</a:t>
             </a:fld>
             <a:endParaRPr lang="es-GT"/>
           </a:p>
@@ -1825,7 +1834,7 @@
           <a:p>
             <a:fld id="{FF6091C4-8205-4F01-9B67-60CD262772CA}" type="datetimeFigureOut">
               <a:rPr lang="es-GT" smtClean="0"/>
-              <a:t>19/02/2026</a:t>
+              <a:t>22/02/2026</a:t>
             </a:fld>
             <a:endParaRPr lang="es-GT"/>
           </a:p>
@@ -1967,7 +1976,7 @@
           <a:p>
             <a:fld id="{FF6091C4-8205-4F01-9B67-60CD262772CA}" type="datetimeFigureOut">
               <a:rPr lang="es-GT" smtClean="0"/>
-              <a:t>19/02/2026</a:t>
+              <a:t>22/02/2026</a:t>
             </a:fld>
             <a:endParaRPr lang="es-GT"/>
           </a:p>
@@ -2080,7 +2089,7 @@
           <a:p>
             <a:fld id="{FF6091C4-8205-4F01-9B67-60CD262772CA}" type="datetimeFigureOut">
               <a:rPr lang="es-GT" smtClean="0"/>
-              <a:t>19/02/2026</a:t>
+              <a:t>22/02/2026</a:t>
             </a:fld>
             <a:endParaRPr lang="es-GT"/>
           </a:p>
@@ -2393,7 +2402,7 @@
           <a:p>
             <a:fld id="{FF6091C4-8205-4F01-9B67-60CD262772CA}" type="datetimeFigureOut">
               <a:rPr lang="es-GT" smtClean="0"/>
-              <a:t>19/02/2026</a:t>
+              <a:t>22/02/2026</a:t>
             </a:fld>
             <a:endParaRPr lang="es-GT"/>
           </a:p>
@@ -2682,7 +2691,7 @@
           <a:p>
             <a:fld id="{FF6091C4-8205-4F01-9B67-60CD262772CA}" type="datetimeFigureOut">
               <a:rPr lang="es-GT" smtClean="0"/>
-              <a:t>19/02/2026</a:t>
+              <a:t>22/02/2026</a:t>
             </a:fld>
             <a:endParaRPr lang="es-GT"/>
           </a:p>
@@ -2925,7 +2934,7 @@
           <a:p>
             <a:fld id="{FF6091C4-8205-4F01-9B67-60CD262772CA}" type="datetimeFigureOut">
               <a:rPr lang="es-GT" smtClean="0"/>
-              <a:t>19/02/2026</a:t>
+              <a:t>22/02/2026</a:t>
             </a:fld>
             <a:endParaRPr lang="es-GT"/>
           </a:p>
@@ -3481,6 +3490,288 @@
 </p:sld>
 </file>
 
+<file path=ppt/slides/slide2.xml><?xml version="1.0" encoding="utf-8"?>
+<p:sld xmlns:a="http://schemas.openxmlformats.org/drawingml/2006/main" xmlns:r="http://schemas.openxmlformats.org/officeDocument/2006/relationships" xmlns:p="http://schemas.openxmlformats.org/presentationml/2006/main">
+  <p:cSld>
+    <p:spTree>
+      <p:nvGrpSpPr>
+        <p:cNvPr id="1" name=""/>
+        <p:cNvGrpSpPr/>
+        <p:nvPr/>
+      </p:nvGrpSpPr>
+      <p:grpSpPr>
+        <a:xfrm>
+          <a:off x="0" y="0"/>
+          <a:ext cx="0" cy="0"/>
+          <a:chOff x="0" y="0"/>
+          <a:chExt cx="0" cy="0"/>
+        </a:xfrm>
+      </p:grpSpPr>
+      <p:sp>
+        <p:nvSpPr>
+          <p:cNvPr id="2" name="Rectángulo 1">
+            <a:extLst>
+              <a:ext uri="{FF2B5EF4-FFF2-40B4-BE49-F238E27FC236}">
+                <a16:creationId xmlns:a16="http://schemas.microsoft.com/office/drawing/2014/main" id="{9F6FCE8A-E45F-8D26-D279-4CBDAFCE4F21}"/>
+              </a:ext>
+            </a:extLst>
+          </p:cNvPr>
+          <p:cNvSpPr/>
+          <p:nvPr/>
+        </p:nvSpPr>
+        <p:spPr>
+          <a:xfrm>
+            <a:off x="1152866" y="1350497"/>
+            <a:ext cx="8202150" cy="4247317"/>
+          </a:xfrm>
+          <a:prstGeom prst="rect">
+            <a:avLst/>
+          </a:prstGeom>
+          <a:noFill/>
+        </p:spPr>
+        <p:txBody>
+          <a:bodyPr wrap="square" lIns="91440" tIns="45720" rIns="91440" bIns="45720">
+            <a:spAutoFit/>
+          </a:bodyPr>
+          <a:lstStyle/>
+          <a:p>
+            <a:r>
+              <a:rPr lang="es-ES" sz="5400" b="0" cap="none" spc="0" dirty="0" err="1">
+                <a:ln w="0"/>
+                <a:solidFill>
+                  <a:schemeClr val="tx1"/>
+                </a:solidFill>
+                <a:effectLst>
+                  <a:outerShdw blurRad="38100" dist="19050" dir="2700000" algn="tl" rotWithShape="0">
+                    <a:schemeClr val="dk1">
+                      <a:alpha val="40000"/>
+                    </a:schemeClr>
+                  </a:outerShdw>
+                </a:effectLst>
+              </a:rPr>
+              <a:t>Dim</a:t>
+            </a:r>
+            <a:r>
+              <a:rPr lang="es-ES" sz="5400" dirty="0">
+                <a:ln w="0"/>
+                <a:effectLst>
+                  <a:outerShdw blurRad="38100" dist="19050" dir="2700000" algn="tl" rotWithShape="0">
+                    <a:schemeClr val="dk1">
+                      <a:alpha val="40000"/>
+                    </a:schemeClr>
+                  </a:outerShdw>
+                </a:effectLst>
+              </a:rPr>
+              <a:t>, </a:t>
+            </a:r>
+            <a:r>
+              <a:rPr lang="es-ES" sz="5400" b="0" cap="none" spc="0" dirty="0">
+                <a:ln w="0"/>
+                <a:solidFill>
+                  <a:schemeClr val="tx1"/>
+                </a:solidFill>
+                <a:effectLst>
+                  <a:outerShdw blurRad="38100" dist="19050" dir="2700000" algn="tl" rotWithShape="0">
+                    <a:schemeClr val="dk1">
+                      <a:alpha val="40000"/>
+                    </a:schemeClr>
+                  </a:outerShdw>
+                </a:effectLst>
+              </a:rPr>
+              <a:t>para dimensionar</a:t>
+            </a:r>
+          </a:p>
+          <a:p>
+            <a:r>
+              <a:rPr lang="es-ES" sz="5400" dirty="0" err="1">
+                <a:ln w="0"/>
+                <a:effectLst>
+                  <a:outerShdw blurRad="38100" dist="19050" dir="2700000" algn="tl" rotWithShape="0">
+                    <a:schemeClr val="dk1">
+                      <a:alpha val="40000"/>
+                    </a:schemeClr>
+                  </a:outerShdw>
+                </a:effectLst>
+              </a:rPr>
+              <a:t>Rect</a:t>
+            </a:r>
+            <a:r>
+              <a:rPr lang="es-ES" sz="5400" dirty="0">
+                <a:ln w="0"/>
+                <a:effectLst>
+                  <a:outerShdw blurRad="38100" dist="19050" dir="2700000" algn="tl" rotWithShape="0">
+                    <a:schemeClr val="dk1">
+                      <a:alpha val="40000"/>
+                    </a:schemeClr>
+                  </a:outerShdw>
+                </a:effectLst>
+              </a:rPr>
+              <a:t>, para rectángulos</a:t>
+            </a:r>
+          </a:p>
+          <a:p>
+            <a:r>
+              <a:rPr lang="es-ES" sz="5400" dirty="0">
+                <a:ln w="0"/>
+                <a:effectLst>
+                  <a:outerShdw blurRad="38100" dist="19050" dir="2700000" algn="tl" rotWithShape="0">
+                    <a:schemeClr val="dk1">
+                      <a:alpha val="40000"/>
+                    </a:schemeClr>
+                  </a:outerShdw>
+                </a:effectLst>
+              </a:rPr>
+              <a:t>CO Copiar</a:t>
+            </a:r>
+          </a:p>
+          <a:p>
+            <a:r>
+              <a:rPr lang="es-ES" sz="5400" dirty="0">
+                <a:ln w="0"/>
+                <a:effectLst>
+                  <a:outerShdw blurRad="38100" dist="19050" dir="2700000" algn="tl" rotWithShape="0">
+                    <a:schemeClr val="dk1">
+                      <a:alpha val="40000"/>
+                    </a:schemeClr>
+                  </a:outerShdw>
+                </a:effectLst>
+              </a:rPr>
+              <a:t>M, MOVE, mover </a:t>
+            </a:r>
+          </a:p>
+          <a:p>
+            <a:r>
+              <a:rPr lang="es-ES" sz="5400" dirty="0">
+                <a:ln w="0"/>
+                <a:effectLst>
+                  <a:outerShdw blurRad="38100" dist="19050" dir="2700000" algn="tl" rotWithShape="0">
+                    <a:schemeClr val="dk1">
+                      <a:alpha val="40000"/>
+                    </a:schemeClr>
+                  </a:outerShdw>
+                </a:effectLst>
+              </a:rPr>
+              <a:t>RO, rotar </a:t>
+            </a:r>
+            <a:endParaRPr lang="es-ES" sz="5400" b="0" cap="none" spc="0" dirty="0">
+              <a:ln w="0"/>
+              <a:solidFill>
+                <a:schemeClr val="tx1"/>
+              </a:solidFill>
+              <a:effectLst>
+                <a:outerShdw blurRad="38100" dist="19050" dir="2700000" algn="tl" rotWithShape="0">
+                  <a:schemeClr val="dk1">
+                    <a:alpha val="40000"/>
+                  </a:schemeClr>
+                </a:outerShdw>
+              </a:effectLst>
+            </a:endParaRPr>
+          </a:p>
+        </p:txBody>
+      </p:sp>
+    </p:spTree>
+    <p:extLst>
+      <p:ext uri="{BB962C8B-B14F-4D97-AF65-F5344CB8AC3E}">
+        <p14:creationId xmlns:p14="http://schemas.microsoft.com/office/powerpoint/2010/main" val="3854674704"/>
+      </p:ext>
+    </p:extLst>
+  </p:cSld>
+  <p:clrMapOvr>
+    <a:masterClrMapping/>
+  </p:clrMapOvr>
+</p:sld>
+</file>
+
+<file path=ppt/slides/slide3.xml><?xml version="1.0" encoding="utf-8"?>
+<p:sld xmlns:a="http://schemas.openxmlformats.org/drawingml/2006/main" xmlns:r="http://schemas.openxmlformats.org/officeDocument/2006/relationships" xmlns:p="http://schemas.openxmlformats.org/presentationml/2006/main">
+  <p:cSld>
+    <p:spTree>
+      <p:nvGrpSpPr>
+        <p:cNvPr id="1" name=""/>
+        <p:cNvGrpSpPr/>
+        <p:nvPr/>
+      </p:nvGrpSpPr>
+      <p:grpSpPr>
+        <a:xfrm>
+          <a:off x="0" y="0"/>
+          <a:ext cx="0" cy="0"/>
+          <a:chOff x="0" y="0"/>
+          <a:chExt cx="0" cy="0"/>
+        </a:xfrm>
+      </p:grpSpPr>
+    </p:spTree>
+    <p:extLst>
+      <p:ext uri="{BB962C8B-B14F-4D97-AF65-F5344CB8AC3E}">
+        <p14:creationId xmlns:p14="http://schemas.microsoft.com/office/powerpoint/2010/main" val="153133281"/>
+      </p:ext>
+    </p:extLst>
+  </p:cSld>
+  <p:clrMapOvr>
+    <a:masterClrMapping/>
+  </p:clrMapOvr>
+</p:sld>
+</file>
+
+<file path=ppt/slides/slide4.xml><?xml version="1.0" encoding="utf-8"?>
+<p:sld xmlns:a="http://schemas.openxmlformats.org/drawingml/2006/main" xmlns:r="http://schemas.openxmlformats.org/officeDocument/2006/relationships" xmlns:p="http://schemas.openxmlformats.org/presentationml/2006/main">
+  <p:cSld>
+    <p:spTree>
+      <p:nvGrpSpPr>
+        <p:cNvPr id="1" name=""/>
+        <p:cNvGrpSpPr/>
+        <p:nvPr/>
+      </p:nvGrpSpPr>
+      <p:grpSpPr>
+        <a:xfrm>
+          <a:off x="0" y="0"/>
+          <a:ext cx="0" cy="0"/>
+          <a:chOff x="0" y="0"/>
+          <a:chExt cx="0" cy="0"/>
+        </a:xfrm>
+      </p:grpSpPr>
+    </p:spTree>
+    <p:extLst>
+      <p:ext uri="{BB962C8B-B14F-4D97-AF65-F5344CB8AC3E}">
+        <p14:creationId xmlns:p14="http://schemas.microsoft.com/office/powerpoint/2010/main" val="2197785981"/>
+      </p:ext>
+    </p:extLst>
+  </p:cSld>
+  <p:clrMapOvr>
+    <a:masterClrMapping/>
+  </p:clrMapOvr>
+</p:sld>
+</file>
+
+<file path=ppt/slides/slide5.xml><?xml version="1.0" encoding="utf-8"?>
+<p:sld xmlns:a="http://schemas.openxmlformats.org/drawingml/2006/main" xmlns:r="http://schemas.openxmlformats.org/officeDocument/2006/relationships" xmlns:p="http://schemas.openxmlformats.org/presentationml/2006/main">
+  <p:cSld>
+    <p:spTree>
+      <p:nvGrpSpPr>
+        <p:cNvPr id="1" name=""/>
+        <p:cNvGrpSpPr/>
+        <p:nvPr/>
+      </p:nvGrpSpPr>
+      <p:grpSpPr>
+        <a:xfrm>
+          <a:off x="0" y="0"/>
+          <a:ext cx="0" cy="0"/>
+          <a:chOff x="0" y="0"/>
+          <a:chExt cx="0" cy="0"/>
+        </a:xfrm>
+      </p:grpSpPr>
+    </p:spTree>
+    <p:extLst>
+      <p:ext uri="{BB962C8B-B14F-4D97-AF65-F5344CB8AC3E}">
+        <p14:creationId xmlns:p14="http://schemas.microsoft.com/office/powerpoint/2010/main" val="2494112589"/>
+      </p:ext>
+    </p:extLst>
+  </p:cSld>
+  <p:clrMapOvr>
+    <a:masterClrMapping/>
+  </p:clrMapOvr>
+</p:sld>
+</file>
+
 <file path=ppt/theme/theme1.xml><?xml version="1.0" encoding="utf-8"?>
 <a:theme xmlns:a="http://schemas.openxmlformats.org/drawingml/2006/main" name="Tema de Office">
   <a:themeElements>
